--- a/TELCO_AUTONOMOUS_RESOLVE_X_Pitch_Deck.pptx
+++ b/TELCO_AUTONOMOUS_RESOLVE_X_Pitch_Deck.pptx
@@ -12,8 +12,8 @@
     <p:sldId id="260" r:id="rId7"/>
     <p:sldId id="261" r:id="rId8"/>
     <p:sldId id="262" r:id="rId9"/>
-    <p:sldId id="263" r:id="rId10"/>
-    <p:sldId id="264" r:id="rId11"/>
+    <p:sldId id="264" r:id="rId10"/>
+    <p:sldId id="263" r:id="rId11"/>
     <p:sldId id="265" r:id="rId12"/>
     <p:sldId id="266" r:id="rId13"/>
     <p:sldId id="267" r:id="rId14"/>
@@ -3993,8 +3993,8 @@
         </p:nvSpPr>
         <p:spPr>
           <a:xfrm>
-            <a:off x="1005840" y="5074920"/>
-            <a:ext cx="10149840" cy="685800"/>
+            <a:off x="1102995" y="5074920"/>
+            <a:ext cx="9955530" cy="275590"/>
           </a:xfrm>
           <a:prstGeom prst="rect">
             <a:avLst/>
@@ -4009,7 +4009,7 @@
           <a:p>
             <a:pPr algn="ctr"/>
             <a:r>
-              <a:rPr sz="1500" b="1">
+              <a:rPr sz="1200" b="1">
                 <a:solidFill>
                   <a:srgbClr val="0B233A"/>
                 </a:solidFill>
@@ -4017,7 +4017,7 @@
               </a:rPr>
               <a:t>Measure next: MTTR, autonomous-resolution rate, first-action success rate, false remediation rate, customer-impact minutes avoided.</a:t>
             </a:r>
-            <a:endParaRPr sz="1500" b="1">
+            <a:endParaRPr sz="1200" b="1">
               <a:solidFill>
                 <a:srgbClr val="0B233A"/>
               </a:solidFill>
@@ -4178,22 +4178,22 @@
         <p:spPr>
           <a:xfrm>
             <a:off x="594360" y="320040"/>
-            <a:ext cx="10972800" cy="502920"/>
-          </a:xfrm>
-          <a:prstGeom prst="rect">
-            <a:avLst/>
-          </a:prstGeom>
-          <a:noFill/>
-        </p:spPr>
-        <p:txBody>
-          <a:bodyPr wrap="none">
-            <a:spAutoFit/>
-          </a:bodyPr>
-          <a:lstStyle/>
-          <a:p>
-            <a:pPr algn="l"/>
-            <a:r>
-              <a:rPr sz="2600" b="1">
+            <a:ext cx="4081145" cy="1076325"/>
+          </a:xfrm>
+          <a:prstGeom prst="rect">
+            <a:avLst/>
+          </a:prstGeom>
+          <a:noFill/>
+        </p:spPr>
+        <p:txBody>
+          <a:bodyPr wrap="none">
+            <a:spAutoFit/>
+          </a:bodyPr>
+          <a:lstStyle/>
+          <a:p>
+            <a:pPr algn="l"/>
+            <a:r>
+              <a:rPr sz="1600" b="1">
                 <a:solidFill>
                   <a:srgbClr val="0B233A"/>
                 </a:solidFill>
@@ -4201,11 +4201,48 @@
               </a:rPr>
               <a:t>2-4 Minute Demo Storyboard</a:t>
             </a:r>
-            <a:endParaRPr sz="2600" b="1">
-              <a:solidFill>
-                <a:srgbClr val="0B233A"/>
-              </a:solidFill>
-              <a:latin typeface="Aptos"/>
+            <a:br>
+              <a:rPr sz="1600" b="1">
+                <a:solidFill>
+                  <a:srgbClr val="0B233A"/>
+                </a:solidFill>
+                <a:latin typeface="Aptos"/>
+              </a:rPr>
+            </a:br>
+            <a:r>
+              <a:rPr sz="1600">
+                <a:solidFill>
+                  <a:srgbClr val="69737D"/>
+                </a:solidFill>
+                <a:latin typeface="Aptos"/>
+                <a:sym typeface="+mn-ea"/>
+              </a:rPr>
+              <a:t>Use INC-1001 for the strongest judge flow.</a:t>
+            </a:r>
+            <a:br>
+              <a:rPr sz="1600">
+                <a:solidFill>
+                  <a:srgbClr val="69737D"/>
+                </a:solidFill>
+                <a:latin typeface="Aptos"/>
+                <a:sym typeface="+mn-ea"/>
+              </a:rPr>
+            </a:br>
+            <a:br>
+              <a:rPr sz="1600">
+                <a:solidFill>
+                  <a:srgbClr val="69737D"/>
+                </a:solidFill>
+                <a:latin typeface="Aptos"/>
+                <a:sym typeface="+mn-ea"/>
+              </a:rPr>
+            </a:br>
+            <a:endParaRPr sz="1600" b="1">
+              <a:solidFill>
+                <a:srgbClr val="69737D"/>
+              </a:solidFill>
+              <a:latin typeface="Aptos"/>
+              <a:sym typeface="+mn-ea"/>
             </a:endParaRPr>
           </a:p>
         </p:txBody>
@@ -4218,33 +4255,114 @@
         </p:nvSpPr>
         <p:spPr>
           <a:xfrm>
-            <a:off x="621792" y="850392"/>
-            <a:ext cx="10972800" cy="411480"/>
-          </a:xfrm>
-          <a:prstGeom prst="rect">
-            <a:avLst/>
-          </a:prstGeom>
-          <a:noFill/>
-        </p:spPr>
-        <p:txBody>
-          <a:bodyPr wrap="none">
-            <a:spAutoFit/>
-          </a:bodyPr>
-          <a:lstStyle/>
-          <a:p>
-            <a:pPr algn="l"/>
-            <a:r>
-              <a:rPr sz="1200" b="0">
-                <a:solidFill>
-                  <a:srgbClr val="69737D"/>
-                </a:solidFill>
-                <a:latin typeface="Aptos"/>
-              </a:rPr>
-              <a:t>Use INC-1001 for the strongest judge flow.</a:t>
-            </a:r>
-            <a:endParaRPr sz="1200" b="0">
-              <a:solidFill>
-                <a:srgbClr val="69737D"/>
+            <a:off x="7378065" y="1270635"/>
+            <a:ext cx="4495165" cy="1624965"/>
+          </a:xfrm>
+          <a:prstGeom prst="rect">
+            <a:avLst/>
+          </a:prstGeom>
+          <a:noFill/>
+        </p:spPr>
+        <p:txBody>
+          <a:bodyPr wrap="none">
+            <a:noAutofit/>
+          </a:bodyPr>
+          <a:lstStyle/>
+          <a:p>
+            <a:pPr algn="l"/>
+            <a:r>
+              <a:rPr lang="en-US" altLang="en-US" sz="1000" b="0">
+                <a:solidFill>
+                  <a:srgbClr val="FF0000"/>
+                </a:solidFill>
+                <a:latin typeface="Aptos"/>
+              </a:rPr>
+              <a:t>INC-1001 — Backhaul congestion → reroute → validation → fallback recovery</a:t>
+            </a:r>
+            <a:endParaRPr lang="en-US" altLang="en-US" sz="1000" b="0">
+              <a:solidFill>
+                <a:srgbClr val="FF0000"/>
+              </a:solidFill>
+              <a:latin typeface="Aptos"/>
+            </a:endParaRPr>
+          </a:p>
+          <a:p>
+            <a:pPr algn="l"/>
+            <a:endParaRPr lang="en-US" altLang="en-US" sz="1000" b="0">
+              <a:solidFill>
+                <a:srgbClr val="FF0000"/>
+              </a:solidFill>
+              <a:latin typeface="Aptos"/>
+            </a:endParaRPr>
+          </a:p>
+          <a:p>
+            <a:pPr algn="l"/>
+            <a:r>
+              <a:rPr lang="en-US" altLang="en-US" sz="1000" b="0">
+                <a:solidFill>
+                  <a:srgbClr val="FF0000"/>
+                </a:solidFill>
+                <a:latin typeface="Aptos"/>
+              </a:rPr>
+              <a:t>INC-1002 — Packet-core saturation → autonomous scaling → validation</a:t>
+            </a:r>
+            <a:endParaRPr lang="en-US" altLang="en-US" sz="1000" b="0">
+              <a:solidFill>
+                <a:srgbClr val="FF0000"/>
+              </a:solidFill>
+              <a:latin typeface="Aptos"/>
+            </a:endParaRPr>
+          </a:p>
+          <a:p>
+            <a:pPr algn="l"/>
+            <a:endParaRPr lang="en-US" altLang="en-US" sz="1000" b="0">
+              <a:solidFill>
+                <a:srgbClr val="FF0000"/>
+              </a:solidFill>
+              <a:latin typeface="Aptos"/>
+            </a:endParaRPr>
+          </a:p>
+          <a:p>
+            <a:pPr algn="l"/>
+            <a:r>
+              <a:rPr lang="en-US" altLang="en-US" sz="1000" b="0">
+                <a:solidFill>
+                  <a:srgbClr val="FF0000"/>
+                </a:solidFill>
+                <a:latin typeface="Aptos"/>
+              </a:rPr>
+              <a:t>INC-1003 — OTP gateway instability → gateway restart → validation</a:t>
+            </a:r>
+            <a:endParaRPr lang="en-US" altLang="en-US" sz="1000" b="0">
+              <a:solidFill>
+                <a:srgbClr val="FF0000"/>
+              </a:solidFill>
+              <a:latin typeface="Aptos"/>
+            </a:endParaRPr>
+          </a:p>
+          <a:p>
+            <a:pPr algn="l"/>
+            <a:endParaRPr lang="en-US" altLang="en-US" sz="1000" b="0">
+              <a:solidFill>
+                <a:srgbClr val="FF0000"/>
+              </a:solidFill>
+              <a:latin typeface="Aptos"/>
+            </a:endParaRPr>
+          </a:p>
+          <a:p>
+            <a:pPr algn="l"/>
+            <a:r>
+              <a:rPr lang="en-US" altLang="en-US" sz="1000" b="0">
+                <a:solidFill>
+                  <a:srgbClr val="FF0000"/>
+                </a:solidFill>
+                <a:latin typeface="Aptos"/>
+              </a:rPr>
+              <a:t>INC-1004 — Cell overload → traffic rebalance → validation</a:t>
+            </a:r>
+            <a:endParaRPr lang="en-US" altLang="en-US" sz="1000" b="0">
+              <a:solidFill>
+                <a:srgbClr val="FF0000"/>
               </a:solidFill>
               <a:latin typeface="Aptos"/>
             </a:endParaRPr>
@@ -4418,16 +4536,16 @@
         </p:nvSpPr>
         <p:spPr>
           <a:xfrm>
-            <a:off x="3977639" y="1115568"/>
-            <a:ext cx="7406640" cy="438912"/>
-          </a:xfrm>
-          <a:prstGeom prst="rect">
-            <a:avLst/>
-          </a:prstGeom>
-          <a:noFill/>
-        </p:spPr>
-        <p:txBody>
-          <a:bodyPr wrap="none">
+            <a:off x="3265805" y="1136015"/>
+            <a:ext cx="4338955" cy="414020"/>
+          </a:xfrm>
+          <a:prstGeom prst="rect">
+            <a:avLst/>
+          </a:prstGeom>
+          <a:noFill/>
+        </p:spPr>
+        <p:txBody>
+          <a:bodyPr wrap="square">
             <a:spAutoFit/>
           </a:bodyPr>
           <a:lstStyle/>
@@ -9599,8 +9717,8 @@
         </p:blipFill>
         <p:spPr>
           <a:xfrm>
-            <a:off x="909955" y="1234440"/>
-            <a:ext cx="11289665" cy="2025015"/>
+            <a:off x="89535" y="2609850"/>
+            <a:ext cx="11945620" cy="2195830"/>
           </a:xfrm>
           <a:prstGeom prst="rect">
             <a:avLst/>
@@ -12296,7 +12414,7 @@
                 </a:solidFill>
                 <a:latin typeface="Aptos"/>
               </a:rPr>
-              <a:t>Prototype Stack</a:t>
+              <a:t>Hackathon Evaluation Alignment</a:t>
             </a:r>
             <a:endParaRPr sz="2600" b="1">
               <a:solidFill>
@@ -12337,7 +12455,7 @@
                 </a:solidFill>
                 <a:latin typeface="Aptos"/>
               </a:rPr>
-              <a:t>Designed for a fast, reproducible hackathon build.</a:t>
+              <a:t>The attached ET AI guidance emphasises AI effectiveness, agentic capability, technical execution, impact, prototype quality and responsible AI.</a:t>
             </a:r>
             <a:endParaRPr sz="1200" b="0">
               <a:solidFill>
@@ -12356,8 +12474,8 @@
         </p:nvSpPr>
         <p:spPr>
           <a:xfrm>
-            <a:off x="731520" y="1234440"/>
-            <a:ext cx="5029200" cy="987552"/>
+            <a:off x="502920" y="1097280"/>
+            <a:ext cx="5440680" cy="950976"/>
           </a:xfrm>
           <a:prstGeom prst="roundRect">
             <a:avLst/>
@@ -12401,8 +12519,8 @@
         </p:nvSpPr>
         <p:spPr>
           <a:xfrm>
-            <a:off x="896112" y="1362456"/>
-            <a:ext cx="4700016" cy="310896"/>
+            <a:off x="667512" y="1225295"/>
+            <a:ext cx="5111496" cy="310896"/>
           </a:xfrm>
           <a:prstGeom prst="rect">
             <a:avLst/>
@@ -12423,7 +12541,7 @@
                 </a:solidFill>
                 <a:latin typeface="Aptos"/>
               </a:rPr>
-              <a:t>UI</a:t>
+              <a:t>Significance &amp; relevance</a:t>
             </a:r>
             <a:endParaRPr sz="1400" b="1">
               <a:solidFill>
@@ -12442,8 +12560,8 @@
         </p:nvSpPr>
         <p:spPr>
           <a:xfrm>
-            <a:off x="896112" y="1746504"/>
-            <a:ext cx="4700016" cy="365760"/>
+            <a:off x="667512" y="1609344"/>
+            <a:ext cx="5111496" cy="329184"/>
           </a:xfrm>
           <a:prstGeom prst="rect">
             <a:avLst/>
@@ -12464,7 +12582,7 @@
                 </a:solidFill>
                 <a:latin typeface="Aptos"/>
               </a:rPr>
-              <a:t>Streamlit dashboard</a:t>
+              <a:t>Telecom operations / customer-impact problem</a:t>
             </a:r>
             <a:endParaRPr sz="1100" b="0">
               <a:solidFill>
@@ -12483,8 +12601,8 @@
         </p:nvSpPr>
         <p:spPr>
           <a:xfrm>
-            <a:off x="6217920" y="1234440"/>
-            <a:ext cx="5029200" cy="987552"/>
+            <a:off x="6172200" y="1097280"/>
+            <a:ext cx="5440680" cy="950976"/>
           </a:xfrm>
           <a:prstGeom prst="roundRect">
             <a:avLst/>
@@ -12528,8 +12646,8 @@
         </p:nvSpPr>
         <p:spPr>
           <a:xfrm>
-            <a:off x="6382512" y="1362456"/>
-            <a:ext cx="4700016" cy="310896"/>
+            <a:off x="6336792" y="1225295"/>
+            <a:ext cx="5111496" cy="310896"/>
           </a:xfrm>
           <a:prstGeom prst="rect">
             <a:avLst/>
@@ -12550,7 +12668,7 @@
                 </a:solidFill>
                 <a:latin typeface="Aptos"/>
               </a:rPr>
-              <a:t>Orchestration</a:t>
+              <a:t>Innovation &amp; originality</a:t>
             </a:r>
             <a:endParaRPr sz="1400" b="1">
               <a:solidFill>
@@ -12569,8 +12687,8 @@
         </p:nvSpPr>
         <p:spPr>
           <a:xfrm>
-            <a:off x="6382512" y="1746504"/>
-            <a:ext cx="4700016" cy="365760"/>
+            <a:off x="6336792" y="1609344"/>
+            <a:ext cx="5111496" cy="329184"/>
           </a:xfrm>
           <a:prstGeom prst="rect">
             <a:avLst/>
@@ -12591,7 +12709,7 @@
                 </a:solidFill>
                 <a:latin typeface="Aptos"/>
               </a:rPr>
-              <a:t>Python agent coordinator + shared state</a:t>
+              <a:t>Closed-loop multi-agent self-healing workflow</a:t>
             </a:r>
             <a:endParaRPr sz="1100" b="0">
               <a:solidFill>
@@ -12610,8 +12728,8 @@
         </p:nvSpPr>
         <p:spPr>
           <a:xfrm>
-            <a:off x="731520" y="2423160"/>
-            <a:ext cx="5029200" cy="987552"/>
+            <a:off x="502920" y="2240280"/>
+            <a:ext cx="5440680" cy="950976"/>
           </a:xfrm>
           <a:prstGeom prst="roundRect">
             <a:avLst/>
@@ -12655,8 +12773,8 @@
         </p:nvSpPr>
         <p:spPr>
           <a:xfrm>
-            <a:off x="896112" y="2551176"/>
-            <a:ext cx="4700016" cy="310896"/>
+            <a:off x="667512" y="2368296"/>
+            <a:ext cx="5111496" cy="310896"/>
           </a:xfrm>
           <a:prstGeom prst="rect">
             <a:avLst/>
@@ -12677,7 +12795,7 @@
                 </a:solidFill>
                 <a:latin typeface="Aptos"/>
               </a:rPr>
-              <a:t>Knowledge</a:t>
+              <a:t>Effective use of AI</a:t>
             </a:r>
             <a:endParaRPr sz="1400" b="1">
               <a:solidFill>
@@ -12696,8 +12814,8 @@
         </p:nvSpPr>
         <p:spPr>
           <a:xfrm>
-            <a:off x="896112" y="2935224"/>
-            <a:ext cx="4700016" cy="365760"/>
+            <a:off x="667512" y="2752344"/>
+            <a:ext cx="5111496" cy="329184"/>
           </a:xfrm>
           <a:prstGeom prst="rect">
             <a:avLst/>
@@ -12718,7 +12836,7 @@
                 </a:solidFill>
                 <a:latin typeface="Aptos"/>
               </a:rPr>
-              <a:t>Local telecom knowledge base + evidence retrieval</a:t>
+              <a:t>RCA reasoning + evidence retrieval + agent planning</a:t>
             </a:r>
             <a:endParaRPr sz="1100" b="0">
               <a:solidFill>
@@ -12737,8 +12855,8 @@
         </p:nvSpPr>
         <p:spPr>
           <a:xfrm>
-            <a:off x="6217920" y="2423160"/>
-            <a:ext cx="5029200" cy="987552"/>
+            <a:off x="6172200" y="2240280"/>
+            <a:ext cx="5440680" cy="950976"/>
           </a:xfrm>
           <a:prstGeom prst="roundRect">
             <a:avLst/>
@@ -12782,8 +12900,8 @@
         </p:nvSpPr>
         <p:spPr>
           <a:xfrm>
-            <a:off x="6382512" y="2551176"/>
-            <a:ext cx="4700016" cy="310896"/>
+            <a:off x="6336792" y="2368296"/>
+            <a:ext cx="5111496" cy="310896"/>
           </a:xfrm>
           <a:prstGeom prst="rect">
             <a:avLst/>
@@ -12804,7 +12922,7 @@
                 </a:solidFill>
                 <a:latin typeface="Aptos"/>
               </a:rPr>
-              <a:t>AI</a:t>
+              <a:t>Technical complexity</a:t>
             </a:r>
             <a:endParaRPr sz="1400" b="1">
               <a:solidFill>
@@ -12823,8 +12941,8 @@
         </p:nvSpPr>
         <p:spPr>
           <a:xfrm>
-            <a:off x="6382512" y="2935224"/>
-            <a:ext cx="4700016" cy="365760"/>
+            <a:off x="6336792" y="2752344"/>
+            <a:ext cx="5111496" cy="329184"/>
           </a:xfrm>
           <a:prstGeom prst="rect">
             <a:avLst/>
@@ -12845,7 +12963,7 @@
                 </a:solidFill>
                 <a:latin typeface="Aptos"/>
               </a:rPr>
-              <a:t>Optional OpenAI model for narrative summarisation</a:t>
+              <a:t>Stateful orchestration, tools, validation and re-planning</a:t>
             </a:r>
             <a:endParaRPr sz="1100" b="0">
               <a:solidFill>
@@ -12864,8 +12982,8 @@
         </p:nvSpPr>
         <p:spPr>
           <a:xfrm>
-            <a:off x="731520" y="3611880"/>
-            <a:ext cx="5029200" cy="987552"/>
+            <a:off x="502920" y="3383280"/>
+            <a:ext cx="5440680" cy="950976"/>
           </a:xfrm>
           <a:prstGeom prst="roundRect">
             <a:avLst/>
@@ -12909,8 +13027,8 @@
         </p:nvSpPr>
         <p:spPr>
           <a:xfrm>
-            <a:off x="896112" y="3739896"/>
-            <a:ext cx="4700016" cy="310896"/>
+            <a:off x="667512" y="3511296"/>
+            <a:ext cx="5111496" cy="310896"/>
           </a:xfrm>
           <a:prstGeom prst="rect">
             <a:avLst/>
@@ -12931,7 +13049,7 @@
                 </a:solidFill>
                 <a:latin typeface="Aptos"/>
               </a:rPr>
-              <a:t>Tools</a:t>
+              <a:t>Agentic autonomy</a:t>
             </a:r>
             <a:endParaRPr sz="1400" b="1">
               <a:solidFill>
@@ -12950,8 +13068,8 @@
         </p:nvSpPr>
         <p:spPr>
           <a:xfrm>
-            <a:off x="896112" y="4123944"/>
-            <a:ext cx="4700016" cy="365760"/>
+            <a:off x="667512" y="3895344"/>
+            <a:ext cx="5111496" cy="329184"/>
           </a:xfrm>
           <a:prstGeom prst="rect">
             <a:avLst/>
@@ -12972,7 +13090,7 @@
                 </a:solidFill>
                 <a:latin typeface="Aptos"/>
               </a:rPr>
-              <a:t>Simulated remediation APIs / action playbooks</a:t>
+              <a:t>Reason → plan → act → recover from failure → close</a:t>
             </a:r>
             <a:endParaRPr sz="1100" b="0">
               <a:solidFill>
@@ -12991,8 +13109,8 @@
         </p:nvSpPr>
         <p:spPr>
           <a:xfrm>
-            <a:off x="6217920" y="3611880"/>
-            <a:ext cx="5029200" cy="987552"/>
+            <a:off x="6172200" y="3383280"/>
+            <a:ext cx="5440680" cy="950976"/>
           </a:xfrm>
           <a:prstGeom prst="roundRect">
             <a:avLst/>
@@ -13036,8 +13154,8 @@
         </p:nvSpPr>
         <p:spPr>
           <a:xfrm>
-            <a:off x="6382512" y="3739896"/>
-            <a:ext cx="4700016" cy="310896"/>
+            <a:off x="6336792" y="3511296"/>
+            <a:ext cx="5111496" cy="310896"/>
           </a:xfrm>
           <a:prstGeom prst="rect">
             <a:avLst/>
@@ -13054,15 +13172,15 @@
             <a:r>
               <a:rPr sz="1400" b="1">
                 <a:solidFill>
-                  <a:srgbClr val="008891"/>
-                </a:solidFill>
-                <a:latin typeface="Aptos"/>
-              </a:rPr>
-              <a:t>Memory</a:t>
+                  <a:srgbClr val="AD3838"/>
+                </a:solidFill>
+                <a:latin typeface="Aptos"/>
+              </a:rPr>
+              <a:t>Business impact</a:t>
             </a:r>
             <a:endParaRPr sz="1400" b="1">
               <a:solidFill>
-                <a:srgbClr val="008891"/>
+                <a:srgbClr val="AD3838"/>
               </a:solidFill>
               <a:latin typeface="Aptos"/>
             </a:endParaRPr>
@@ -13077,8 +13195,8 @@
         </p:nvSpPr>
         <p:spPr>
           <a:xfrm>
-            <a:off x="6382512" y="4123944"/>
-            <a:ext cx="4700016" cy="365760"/>
+            <a:off x="6336792" y="3895344"/>
+            <a:ext cx="5111496" cy="329184"/>
           </a:xfrm>
           <a:prstGeom prst="rect">
             <a:avLst/>
@@ -13099,7 +13217,7 @@
                 </a:solidFill>
                 <a:latin typeface="Aptos"/>
               </a:rPr>
-              <a:t>JSON incident audit memory</a:t>
+              <a:t>MTTR reduction potential and fewer manual hand-offs</a:t>
             </a:r>
             <a:endParaRPr sz="1100" b="0">
               <a:solidFill>
@@ -13118,8 +13236,8 @@
         </p:nvSpPr>
         <p:spPr>
           <a:xfrm>
-            <a:off x="731520" y="4800600"/>
-            <a:ext cx="5029200" cy="987552"/>
+            <a:off x="502920" y="4526280"/>
+            <a:ext cx="5440680" cy="950976"/>
           </a:xfrm>
           <a:prstGeom prst="roundRect">
             <a:avLst/>
@@ -13163,8 +13281,8 @@
         </p:nvSpPr>
         <p:spPr>
           <a:xfrm>
-            <a:off x="896112" y="4928616"/>
-            <a:ext cx="4700016" cy="310896"/>
+            <a:off x="667512" y="4654296"/>
+            <a:ext cx="5111496" cy="310896"/>
           </a:xfrm>
           <a:prstGeom prst="rect">
             <a:avLst/>
@@ -13181,15 +13299,15 @@
             <a:r>
               <a:rPr sz="1400" b="1">
                 <a:solidFill>
-                  <a:srgbClr val="AD3838"/>
-                </a:solidFill>
-                <a:latin typeface="Aptos"/>
-              </a:rPr>
-              <a:t>Deployment</a:t>
+                  <a:srgbClr val="008891"/>
+                </a:solidFill>
+                <a:latin typeface="Aptos"/>
+              </a:rPr>
+              <a:t>Prototype quality</a:t>
             </a:r>
             <a:endParaRPr sz="1400" b="1">
               <a:solidFill>
-                <a:srgbClr val="AD3838"/>
+                <a:srgbClr val="008891"/>
               </a:solidFill>
               <a:latin typeface="Aptos"/>
             </a:endParaRPr>
@@ -13204,8 +13322,8 @@
         </p:nvSpPr>
         <p:spPr>
           <a:xfrm>
-            <a:off x="896112" y="5312664"/>
-            <a:ext cx="4700016" cy="365760"/>
+            <a:off x="667512" y="5038344"/>
+            <a:ext cx="5111496" cy="329184"/>
           </a:xfrm>
           <a:prstGeom prst="rect">
             <a:avLst/>
@@ -13226,7 +13344,7 @@
                 </a:solidFill>
                 <a:latin typeface="Aptos"/>
               </a:rPr>
-              <a:t>Local / container-ready pattern</a:t>
+              <a:t>Interactive UI + 4 deterministic demo scenarios</a:t>
             </a:r>
             <a:endParaRPr sz="1100" b="0">
               <a:solidFill>
@@ -13239,7 +13357,134 @@
       </p:sp>
       <p:sp>
         <p:nvSpPr>
-          <p:cNvPr id="26" name="TextBox 25"/>
+          <p:cNvPr id="26" name="Rounded Rectangle 25"/>
+          <p:cNvSpPr/>
+          <p:nvPr/>
+        </p:nvSpPr>
+        <p:spPr>
+          <a:xfrm>
+            <a:off x="6172200" y="4526280"/>
+            <a:ext cx="5440680" cy="950976"/>
+          </a:xfrm>
+          <a:prstGeom prst="roundRect">
+            <a:avLst/>
+          </a:prstGeom>
+          <a:solidFill>
+            <a:srgbClr val="FFFFFF"/>
+          </a:solidFill>
+          <a:ln>
+            <a:solidFill>
+              <a:srgbClr val="DCE4EB"/>
+            </a:solidFill>
+          </a:ln>
+        </p:spPr>
+        <p:style>
+          <a:lnRef idx="1">
+            <a:schemeClr val="accent1"/>
+          </a:lnRef>
+          <a:fillRef idx="3">
+            <a:schemeClr val="accent1"/>
+          </a:fillRef>
+          <a:effectRef idx="2">
+            <a:schemeClr val="accent1"/>
+          </a:effectRef>
+          <a:fontRef idx="minor">
+            <a:schemeClr val="lt1"/>
+          </a:fontRef>
+        </p:style>
+        <p:txBody>
+          <a:bodyPr rtlCol="0" anchor="ctr"/>
+          <a:lstStyle/>
+          <a:p>
+            <a:pPr algn="ctr"/>
+          </a:p>
+        </p:txBody>
+      </p:sp>
+      <p:sp>
+        <p:nvSpPr>
+          <p:cNvPr id="27" name="TextBox 26"/>
+          <p:cNvSpPr txBox="1"/>
+          <p:nvPr/>
+        </p:nvSpPr>
+        <p:spPr>
+          <a:xfrm>
+            <a:off x="6336792" y="4654296"/>
+            <a:ext cx="5111496" cy="310896"/>
+          </a:xfrm>
+          <a:prstGeom prst="rect">
+            <a:avLst/>
+          </a:prstGeom>
+          <a:noFill/>
+        </p:spPr>
+        <p:txBody>
+          <a:bodyPr wrap="none">
+            <a:spAutoFit/>
+          </a:bodyPr>
+          <a:lstStyle/>
+          <a:p>
+            <a:pPr algn="l"/>
+            <a:r>
+              <a:rPr sz="1400" b="1">
+                <a:solidFill>
+                  <a:srgbClr val="0B233A"/>
+                </a:solidFill>
+                <a:latin typeface="Aptos"/>
+              </a:rPr>
+              <a:t>Responsible AI</a:t>
+            </a:r>
+            <a:endParaRPr sz="1400" b="1">
+              <a:solidFill>
+                <a:srgbClr val="0B233A"/>
+              </a:solidFill>
+              <a:latin typeface="Aptos"/>
+            </a:endParaRPr>
+          </a:p>
+        </p:txBody>
+      </p:sp>
+      <p:sp>
+        <p:nvSpPr>
+          <p:cNvPr id="28" name="TextBox 27"/>
+          <p:cNvSpPr txBox="1"/>
+          <p:nvPr/>
+        </p:nvSpPr>
+        <p:spPr>
+          <a:xfrm>
+            <a:off x="6336792" y="5038344"/>
+            <a:ext cx="5111496" cy="329184"/>
+          </a:xfrm>
+          <a:prstGeom prst="rect">
+            <a:avLst/>
+          </a:prstGeom>
+          <a:noFill/>
+        </p:spPr>
+        <p:txBody>
+          <a:bodyPr wrap="none">
+            <a:spAutoFit/>
+          </a:bodyPr>
+          <a:lstStyle/>
+          <a:p>
+            <a:pPr algn="l"/>
+            <a:r>
+              <a:rPr sz="1100" b="0">
+                <a:solidFill>
+                  <a:srgbClr val="27313A"/>
+                </a:solidFill>
+                <a:latin typeface="Aptos"/>
+              </a:rPr>
+              <a:t>Allow-listed tools, audit trail, no production access</a:t>
+            </a:r>
+            <a:endParaRPr sz="1100" b="0">
+              <a:solidFill>
+                <a:srgbClr val="27313A"/>
+              </a:solidFill>
+              <a:latin typeface="Aptos"/>
+            </a:endParaRPr>
+          </a:p>
+        </p:txBody>
+      </p:sp>
+      <p:sp>
+        <p:nvSpPr>
+          <p:cNvPr id="29" name="TextBox 28"/>
           <p:cNvSpPr txBox="1"/>
           <p:nvPr/>
         </p:nvSpPr>
@@ -13280,7 +13525,7 @@
       </p:sp>
       <p:sp>
         <p:nvSpPr>
-          <p:cNvPr id="27" name="TextBox 26"/>
+          <p:cNvPr id="30" name="TextBox 29"/>
           <p:cNvSpPr txBox="1"/>
           <p:nvPr/>
         </p:nvSpPr>
@@ -13308,7 +13553,7 @@
                 </a:solidFill>
                 <a:latin typeface="Aptos"/>
               </a:rPr>
-              <a:t>8</a:t>
+              <a:t>9</a:t>
             </a:r>
             <a:endParaRPr sz="800" b="0">
               <a:solidFill>
@@ -13410,7 +13655,7 @@
                 </a:solidFill>
                 <a:latin typeface="Aptos"/>
               </a:rPr>
-              <a:t>Hackathon Evaluation Alignment</a:t>
+              <a:t>Prototype Stack</a:t>
             </a:r>
             <a:endParaRPr sz="2600" b="1">
               <a:solidFill>
@@ -13451,7 +13696,7 @@
                 </a:solidFill>
                 <a:latin typeface="Aptos"/>
               </a:rPr>
-              <a:t>The attached ET AI guidance emphasises AI effectiveness, agentic capability, technical execution, impact, prototype quality and responsible AI.</a:t>
+              <a:t>Designed for a fast, reproducible hackathon build.</a:t>
             </a:r>
             <a:endParaRPr sz="1200" b="0">
               <a:solidFill>
@@ -13470,8 +13715,8 @@
         </p:nvSpPr>
         <p:spPr>
           <a:xfrm>
-            <a:off x="502920" y="1097280"/>
-            <a:ext cx="5440680" cy="950976"/>
+            <a:off x="731520" y="1234440"/>
+            <a:ext cx="5029200" cy="987552"/>
           </a:xfrm>
           <a:prstGeom prst="roundRect">
             <a:avLst/>
@@ -13515,8 +13760,8 @@
         </p:nvSpPr>
         <p:spPr>
           <a:xfrm>
-            <a:off x="667512" y="1225295"/>
-            <a:ext cx="5111496" cy="310896"/>
+            <a:off x="896112" y="1362456"/>
+            <a:ext cx="4700016" cy="310896"/>
           </a:xfrm>
           <a:prstGeom prst="rect">
             <a:avLst/>
@@ -13537,7 +13782,7 @@
                 </a:solidFill>
                 <a:latin typeface="Aptos"/>
               </a:rPr>
-              <a:t>Significance &amp; relevance</a:t>
+              <a:t>UI</a:t>
             </a:r>
             <a:endParaRPr sz="1400" b="1">
               <a:solidFill>
@@ -13556,8 +13801,8 @@
         </p:nvSpPr>
         <p:spPr>
           <a:xfrm>
-            <a:off x="667512" y="1609344"/>
-            <a:ext cx="5111496" cy="329184"/>
+            <a:off x="896112" y="1746504"/>
+            <a:ext cx="4700016" cy="365760"/>
           </a:xfrm>
           <a:prstGeom prst="rect">
             <a:avLst/>
@@ -13578,7 +13823,7 @@
                 </a:solidFill>
                 <a:latin typeface="Aptos"/>
               </a:rPr>
-              <a:t>Telecom operations / customer-impact problem</a:t>
+              <a:t>Streamlit dashboard</a:t>
             </a:r>
             <a:endParaRPr sz="1100" b="0">
               <a:solidFill>
@@ -13597,8 +13842,8 @@
         </p:nvSpPr>
         <p:spPr>
           <a:xfrm>
-            <a:off x="6172200" y="1097280"/>
-            <a:ext cx="5440680" cy="950976"/>
+            <a:off x="6217920" y="1234440"/>
+            <a:ext cx="5029200" cy="987552"/>
           </a:xfrm>
           <a:prstGeom prst="roundRect">
             <a:avLst/>
@@ -13642,8 +13887,8 @@
         </p:nvSpPr>
         <p:spPr>
           <a:xfrm>
-            <a:off x="6336792" y="1225295"/>
-            <a:ext cx="5111496" cy="310896"/>
+            <a:off x="6382512" y="1362456"/>
+            <a:ext cx="4700016" cy="310896"/>
           </a:xfrm>
           <a:prstGeom prst="rect">
             <a:avLst/>
@@ -13664,7 +13909,7 @@
                 </a:solidFill>
                 <a:latin typeface="Aptos"/>
               </a:rPr>
-              <a:t>Innovation &amp; originality</a:t>
+              <a:t>Orchestration</a:t>
             </a:r>
             <a:endParaRPr sz="1400" b="1">
               <a:solidFill>
@@ -13683,8 +13928,8 @@
         </p:nvSpPr>
         <p:spPr>
           <a:xfrm>
-            <a:off x="6336792" y="1609344"/>
-            <a:ext cx="5111496" cy="329184"/>
+            <a:off x="6382512" y="1746504"/>
+            <a:ext cx="4700016" cy="365760"/>
           </a:xfrm>
           <a:prstGeom prst="rect">
             <a:avLst/>
@@ -13705,7 +13950,7 @@
                 </a:solidFill>
                 <a:latin typeface="Aptos"/>
               </a:rPr>
-              <a:t>Closed-loop multi-agent self-healing workflow</a:t>
+              <a:t>Python agent coordinator + shared state</a:t>
             </a:r>
             <a:endParaRPr sz="1100" b="0">
               <a:solidFill>
@@ -13724,8 +13969,8 @@
         </p:nvSpPr>
         <p:spPr>
           <a:xfrm>
-            <a:off x="502920" y="2240280"/>
-            <a:ext cx="5440680" cy="950976"/>
+            <a:off x="731520" y="2423160"/>
+            <a:ext cx="5029200" cy="987552"/>
           </a:xfrm>
           <a:prstGeom prst="roundRect">
             <a:avLst/>
@@ -13769,8 +14014,8 @@
         </p:nvSpPr>
         <p:spPr>
           <a:xfrm>
-            <a:off x="667512" y="2368296"/>
-            <a:ext cx="5111496" cy="310896"/>
+            <a:off x="896112" y="2551176"/>
+            <a:ext cx="4700016" cy="310896"/>
           </a:xfrm>
           <a:prstGeom prst="rect">
             <a:avLst/>
@@ -13791,7 +14036,7 @@
                 </a:solidFill>
                 <a:latin typeface="Aptos"/>
               </a:rPr>
-              <a:t>Effective use of AI</a:t>
+              <a:t>Knowledge</a:t>
             </a:r>
             <a:endParaRPr sz="1400" b="1">
               <a:solidFill>
@@ -13810,8 +14055,8 @@
         </p:nvSpPr>
         <p:spPr>
           <a:xfrm>
-            <a:off x="667512" y="2752344"/>
-            <a:ext cx="5111496" cy="329184"/>
+            <a:off x="896112" y="2935224"/>
+            <a:ext cx="4700016" cy="365760"/>
           </a:xfrm>
           <a:prstGeom prst="rect">
             <a:avLst/>
@@ -13832,7 +14077,7 @@
                 </a:solidFill>
                 <a:latin typeface="Aptos"/>
               </a:rPr>
-              <a:t>RCA reasoning + evidence retrieval + agent planning</a:t>
+              <a:t>Local telecom knowledge base + evidence retrieval</a:t>
             </a:r>
             <a:endParaRPr sz="1100" b="0">
               <a:solidFill>
@@ -13851,8 +14096,8 @@
         </p:nvSpPr>
         <p:spPr>
           <a:xfrm>
-            <a:off x="6172200" y="2240280"/>
-            <a:ext cx="5440680" cy="950976"/>
+            <a:off x="6217920" y="2423160"/>
+            <a:ext cx="5029200" cy="987552"/>
           </a:xfrm>
           <a:prstGeom prst="roundRect">
             <a:avLst/>
@@ -13896,8 +14141,8 @@
         </p:nvSpPr>
         <p:spPr>
           <a:xfrm>
-            <a:off x="6336792" y="2368296"/>
-            <a:ext cx="5111496" cy="310896"/>
+            <a:off x="6382512" y="2551176"/>
+            <a:ext cx="4700016" cy="310896"/>
           </a:xfrm>
           <a:prstGeom prst="rect">
             <a:avLst/>
@@ -13918,7 +14163,7 @@
                 </a:solidFill>
                 <a:latin typeface="Aptos"/>
               </a:rPr>
-              <a:t>Technical complexity</a:t>
+              <a:t>AI</a:t>
             </a:r>
             <a:endParaRPr sz="1400" b="1">
               <a:solidFill>
@@ -13937,8 +14182,8 @@
         </p:nvSpPr>
         <p:spPr>
           <a:xfrm>
-            <a:off x="6336792" y="2752344"/>
-            <a:ext cx="5111496" cy="329184"/>
+            <a:off x="6382512" y="2935224"/>
+            <a:ext cx="4700016" cy="365760"/>
           </a:xfrm>
           <a:prstGeom prst="rect">
             <a:avLst/>
@@ -13959,7 +14204,7 @@
                 </a:solidFill>
                 <a:latin typeface="Aptos"/>
               </a:rPr>
-              <a:t>Stateful orchestration, tools, validation and re-planning</a:t>
+              <a:t>Optional OpenAI model for narrative summarisation</a:t>
             </a:r>
             <a:endParaRPr sz="1100" b="0">
               <a:solidFill>
@@ -13978,8 +14223,8 @@
         </p:nvSpPr>
         <p:spPr>
           <a:xfrm>
-            <a:off x="502920" y="3383280"/>
-            <a:ext cx="5440680" cy="950976"/>
+            <a:off x="731520" y="3611880"/>
+            <a:ext cx="5029200" cy="987552"/>
           </a:xfrm>
           <a:prstGeom prst="roundRect">
             <a:avLst/>
@@ -14023,8 +14268,8 @@
         </p:nvSpPr>
         <p:spPr>
           <a:xfrm>
-            <a:off x="667512" y="3511296"/>
-            <a:ext cx="5111496" cy="310896"/>
+            <a:off x="896112" y="3739896"/>
+            <a:ext cx="4700016" cy="310896"/>
           </a:xfrm>
           <a:prstGeom prst="rect">
             <a:avLst/>
@@ -14045,7 +14290,7 @@
                 </a:solidFill>
                 <a:latin typeface="Aptos"/>
               </a:rPr>
-              <a:t>Agentic autonomy</a:t>
+              <a:t>Tools</a:t>
             </a:r>
             <a:endParaRPr sz="1400" b="1">
               <a:solidFill>
@@ -14064,8 +14309,8 @@
         </p:nvSpPr>
         <p:spPr>
           <a:xfrm>
-            <a:off x="667512" y="3895344"/>
-            <a:ext cx="5111496" cy="329184"/>
+            <a:off x="896112" y="4123944"/>
+            <a:ext cx="4700016" cy="365760"/>
           </a:xfrm>
           <a:prstGeom prst="rect">
             <a:avLst/>
@@ -14086,7 +14331,7 @@
                 </a:solidFill>
                 <a:latin typeface="Aptos"/>
               </a:rPr>
-              <a:t>Reason → plan → act → recover from failure → close</a:t>
+              <a:t>Simulated remediation APIs / action playbooks</a:t>
             </a:r>
             <a:endParaRPr sz="1100" b="0">
               <a:solidFill>
@@ -14105,8 +14350,8 @@
         </p:nvSpPr>
         <p:spPr>
           <a:xfrm>
-            <a:off x="6172200" y="3383280"/>
-            <a:ext cx="5440680" cy="950976"/>
+            <a:off x="6217920" y="3611880"/>
+            <a:ext cx="5029200" cy="987552"/>
           </a:xfrm>
           <a:prstGeom prst="roundRect">
             <a:avLst/>
@@ -14150,8 +14395,8 @@
         </p:nvSpPr>
         <p:spPr>
           <a:xfrm>
-            <a:off x="6336792" y="3511296"/>
-            <a:ext cx="5111496" cy="310896"/>
+            <a:off x="6382512" y="3739896"/>
+            <a:ext cx="4700016" cy="310896"/>
           </a:xfrm>
           <a:prstGeom prst="rect">
             <a:avLst/>
@@ -14168,15 +14413,15 @@
             <a:r>
               <a:rPr sz="1400" b="1">
                 <a:solidFill>
-                  <a:srgbClr val="AD3838"/>
-                </a:solidFill>
-                <a:latin typeface="Aptos"/>
-              </a:rPr>
-              <a:t>Business impact</a:t>
+                  <a:srgbClr val="008891"/>
+                </a:solidFill>
+                <a:latin typeface="Aptos"/>
+              </a:rPr>
+              <a:t>Memory</a:t>
             </a:r>
             <a:endParaRPr sz="1400" b="1">
               <a:solidFill>
-                <a:srgbClr val="AD3838"/>
+                <a:srgbClr val="008891"/>
               </a:solidFill>
               <a:latin typeface="Aptos"/>
             </a:endParaRPr>
@@ -14191,8 +14436,8 @@
         </p:nvSpPr>
         <p:spPr>
           <a:xfrm>
-            <a:off x="6336792" y="3895344"/>
-            <a:ext cx="5111496" cy="329184"/>
+            <a:off x="6382512" y="4123944"/>
+            <a:ext cx="4700016" cy="365760"/>
           </a:xfrm>
           <a:prstGeom prst="rect">
             <a:avLst/>
@@ -14213,7 +14458,7 @@
                 </a:solidFill>
                 <a:latin typeface="Aptos"/>
               </a:rPr>
-              <a:t>MTTR reduction potential and fewer manual hand-offs</a:t>
+              <a:t>JSON incident audit memory</a:t>
             </a:r>
             <a:endParaRPr sz="1100" b="0">
               <a:solidFill>
@@ -14232,8 +14477,8 @@
         </p:nvSpPr>
         <p:spPr>
           <a:xfrm>
-            <a:off x="502920" y="4526280"/>
-            <a:ext cx="5440680" cy="950976"/>
+            <a:off x="731520" y="4800600"/>
+            <a:ext cx="5029200" cy="987552"/>
           </a:xfrm>
           <a:prstGeom prst="roundRect">
             <a:avLst/>
@@ -14277,8 +14522,8 @@
         </p:nvSpPr>
         <p:spPr>
           <a:xfrm>
-            <a:off x="667512" y="4654296"/>
-            <a:ext cx="5111496" cy="310896"/>
+            <a:off x="896112" y="4928616"/>
+            <a:ext cx="4700016" cy="310896"/>
           </a:xfrm>
           <a:prstGeom prst="rect">
             <a:avLst/>
@@ -14295,15 +14540,15 @@
             <a:r>
               <a:rPr sz="1400" b="1">
                 <a:solidFill>
-                  <a:srgbClr val="008891"/>
-                </a:solidFill>
-                <a:latin typeface="Aptos"/>
-              </a:rPr>
-              <a:t>Prototype quality</a:t>
+                  <a:srgbClr val="AD3838"/>
+                </a:solidFill>
+                <a:latin typeface="Aptos"/>
+              </a:rPr>
+              <a:t>Deployment</a:t>
             </a:r>
             <a:endParaRPr sz="1400" b="1">
               <a:solidFill>
-                <a:srgbClr val="008891"/>
+                <a:srgbClr val="AD3838"/>
               </a:solidFill>
               <a:latin typeface="Aptos"/>
             </a:endParaRPr>
@@ -14318,8 +14563,8 @@
         </p:nvSpPr>
         <p:spPr>
           <a:xfrm>
-            <a:off x="667512" y="5038344"/>
-            <a:ext cx="5111496" cy="329184"/>
+            <a:off x="896112" y="5312664"/>
+            <a:ext cx="4700016" cy="365760"/>
           </a:xfrm>
           <a:prstGeom prst="rect">
             <a:avLst/>
@@ -14340,7 +14585,7 @@
                 </a:solidFill>
                 <a:latin typeface="Aptos"/>
               </a:rPr>
-              <a:t>Interactive UI + 4 deterministic demo scenarios</a:t>
+              <a:t>Local / container-ready pattern</a:t>
             </a:r>
             <a:endParaRPr sz="1100" b="0">
               <a:solidFill>
@@ -14353,134 +14598,7 @@
       </p:sp>
       <p:sp>
         <p:nvSpPr>
-          <p:cNvPr id="26" name="Rounded Rectangle 25"/>
-          <p:cNvSpPr/>
-          <p:nvPr/>
-        </p:nvSpPr>
-        <p:spPr>
-          <a:xfrm>
-            <a:off x="6172200" y="4526280"/>
-            <a:ext cx="5440680" cy="950976"/>
-          </a:xfrm>
-          <a:prstGeom prst="roundRect">
-            <a:avLst/>
-          </a:prstGeom>
-          <a:solidFill>
-            <a:srgbClr val="FFFFFF"/>
-          </a:solidFill>
-          <a:ln>
-            <a:solidFill>
-              <a:srgbClr val="DCE4EB"/>
-            </a:solidFill>
-          </a:ln>
-        </p:spPr>
-        <p:style>
-          <a:lnRef idx="1">
-            <a:schemeClr val="accent1"/>
-          </a:lnRef>
-          <a:fillRef idx="3">
-            <a:schemeClr val="accent1"/>
-          </a:fillRef>
-          <a:effectRef idx="2">
-            <a:schemeClr val="accent1"/>
-          </a:effectRef>
-          <a:fontRef idx="minor">
-            <a:schemeClr val="lt1"/>
-          </a:fontRef>
-        </p:style>
-        <p:txBody>
-          <a:bodyPr rtlCol="0" anchor="ctr"/>
-          <a:lstStyle/>
-          <a:p>
-            <a:pPr algn="ctr"/>
-          </a:p>
-        </p:txBody>
-      </p:sp>
-      <p:sp>
-        <p:nvSpPr>
-          <p:cNvPr id="27" name="TextBox 26"/>
-          <p:cNvSpPr txBox="1"/>
-          <p:nvPr/>
-        </p:nvSpPr>
-        <p:spPr>
-          <a:xfrm>
-            <a:off x="6336792" y="4654296"/>
-            <a:ext cx="5111496" cy="310896"/>
-          </a:xfrm>
-          <a:prstGeom prst="rect">
-            <a:avLst/>
-          </a:prstGeom>
-          <a:noFill/>
-        </p:spPr>
-        <p:txBody>
-          <a:bodyPr wrap="none">
-            <a:spAutoFit/>
-          </a:bodyPr>
-          <a:lstStyle/>
-          <a:p>
-            <a:pPr algn="l"/>
-            <a:r>
-              <a:rPr sz="1400" b="1">
-                <a:solidFill>
-                  <a:srgbClr val="0B233A"/>
-                </a:solidFill>
-                <a:latin typeface="Aptos"/>
-              </a:rPr>
-              <a:t>Responsible AI</a:t>
-            </a:r>
-            <a:endParaRPr sz="1400" b="1">
-              <a:solidFill>
-                <a:srgbClr val="0B233A"/>
-              </a:solidFill>
-              <a:latin typeface="Aptos"/>
-            </a:endParaRPr>
-          </a:p>
-        </p:txBody>
-      </p:sp>
-      <p:sp>
-        <p:nvSpPr>
-          <p:cNvPr id="28" name="TextBox 27"/>
-          <p:cNvSpPr txBox="1"/>
-          <p:nvPr/>
-        </p:nvSpPr>
-        <p:spPr>
-          <a:xfrm>
-            <a:off x="6336792" y="5038344"/>
-            <a:ext cx="5111496" cy="329184"/>
-          </a:xfrm>
-          <a:prstGeom prst="rect">
-            <a:avLst/>
-          </a:prstGeom>
-          <a:noFill/>
-        </p:spPr>
-        <p:txBody>
-          <a:bodyPr wrap="none">
-            <a:spAutoFit/>
-          </a:bodyPr>
-          <a:lstStyle/>
-          <a:p>
-            <a:pPr algn="l"/>
-            <a:r>
-              <a:rPr sz="1100" b="0">
-                <a:solidFill>
-                  <a:srgbClr val="27313A"/>
-                </a:solidFill>
-                <a:latin typeface="Aptos"/>
-              </a:rPr>
-              <a:t>Allow-listed tools, audit trail, no production access</a:t>
-            </a:r>
-            <a:endParaRPr sz="1100" b="0">
-              <a:solidFill>
-                <a:srgbClr val="27313A"/>
-              </a:solidFill>
-              <a:latin typeface="Aptos"/>
-            </a:endParaRPr>
-          </a:p>
-        </p:txBody>
-      </p:sp>
-      <p:sp>
-        <p:nvSpPr>
-          <p:cNvPr id="29" name="TextBox 28"/>
+          <p:cNvPr id="26" name="TextBox 25"/>
           <p:cNvSpPr txBox="1"/>
           <p:nvPr/>
         </p:nvSpPr>
@@ -14521,7 +14639,7 @@
       </p:sp>
       <p:sp>
         <p:nvSpPr>
-          <p:cNvPr id="30" name="TextBox 29"/>
+          <p:cNvPr id="27" name="TextBox 26"/>
           <p:cNvSpPr txBox="1"/>
           <p:nvPr/>
         </p:nvSpPr>
@@ -14549,7 +14667,7 @@
                 </a:solidFill>
                 <a:latin typeface="Aptos"/>
               </a:rPr>
-              <a:t>9</a:t>
+              <a:t>8</a:t>
             </a:r>
             <a:endParaRPr sz="800" b="0">
               <a:solidFill>
